--- a/analysis/submitted_analyses/aDDM_ModelComparison_E+C.pptx
+++ b/analysis/submitted_analyses/aDDM_ModelComparison_E+C.pptx
@@ -243,7 +243,7 @@
           <a:p>
             <a:fld id="{CFC60B5F-2253-DF41-8690-61B53F1555CE}" type="datetimeFigureOut">
               <a:rPr lang="en-US" smtClean="0"/>
-              <a:t>6/18/24</a:t>
+              <a:t>7/1/24</a:t>
             </a:fld>
             <a:endParaRPr lang="en-US"/>
           </a:p>
@@ -413,7 +413,7 @@
           <a:p>
             <a:fld id="{CFC60B5F-2253-DF41-8690-61B53F1555CE}" type="datetimeFigureOut">
               <a:rPr lang="en-US" smtClean="0"/>
-              <a:t>6/18/24</a:t>
+              <a:t>7/1/24</a:t>
             </a:fld>
             <a:endParaRPr lang="en-US"/>
           </a:p>
@@ -593,7 +593,7 @@
           <a:p>
             <a:fld id="{CFC60B5F-2253-DF41-8690-61B53F1555CE}" type="datetimeFigureOut">
               <a:rPr lang="en-US" smtClean="0"/>
-              <a:t>6/18/24</a:t>
+              <a:t>7/1/24</a:t>
             </a:fld>
             <a:endParaRPr lang="en-US"/>
           </a:p>
@@ -763,7 +763,7 @@
           <a:p>
             <a:fld id="{CFC60B5F-2253-DF41-8690-61B53F1555CE}" type="datetimeFigureOut">
               <a:rPr lang="en-US" smtClean="0"/>
-              <a:t>6/18/24</a:t>
+              <a:t>7/1/24</a:t>
             </a:fld>
             <a:endParaRPr lang="en-US"/>
           </a:p>
@@ -1009,7 +1009,7 @@
           <a:p>
             <a:fld id="{CFC60B5F-2253-DF41-8690-61B53F1555CE}" type="datetimeFigureOut">
               <a:rPr lang="en-US" smtClean="0"/>
-              <a:t>6/18/24</a:t>
+              <a:t>7/1/24</a:t>
             </a:fld>
             <a:endParaRPr lang="en-US"/>
           </a:p>
@@ -1241,7 +1241,7 @@
           <a:p>
             <a:fld id="{CFC60B5F-2253-DF41-8690-61B53F1555CE}" type="datetimeFigureOut">
               <a:rPr lang="en-US" smtClean="0"/>
-              <a:t>6/18/24</a:t>
+              <a:t>7/1/24</a:t>
             </a:fld>
             <a:endParaRPr lang="en-US"/>
           </a:p>
@@ -1608,7 +1608,7 @@
           <a:p>
             <a:fld id="{CFC60B5F-2253-DF41-8690-61B53F1555CE}" type="datetimeFigureOut">
               <a:rPr lang="en-US" smtClean="0"/>
-              <a:t>6/18/24</a:t>
+              <a:t>7/1/24</a:t>
             </a:fld>
             <a:endParaRPr lang="en-US"/>
           </a:p>
@@ -1726,7 +1726,7 @@
           <a:p>
             <a:fld id="{CFC60B5F-2253-DF41-8690-61B53F1555CE}" type="datetimeFigureOut">
               <a:rPr lang="en-US" smtClean="0"/>
-              <a:t>6/18/24</a:t>
+              <a:t>7/1/24</a:t>
             </a:fld>
             <a:endParaRPr lang="en-US"/>
           </a:p>
@@ -1821,7 +1821,7 @@
           <a:p>
             <a:fld id="{CFC60B5F-2253-DF41-8690-61B53F1555CE}" type="datetimeFigureOut">
               <a:rPr lang="en-US" smtClean="0"/>
-              <a:t>6/18/24</a:t>
+              <a:t>7/1/24</a:t>
             </a:fld>
             <a:endParaRPr lang="en-US"/>
           </a:p>
@@ -2098,7 +2098,7 @@
           <a:p>
             <a:fld id="{CFC60B5F-2253-DF41-8690-61B53F1555CE}" type="datetimeFigureOut">
               <a:rPr lang="en-US" smtClean="0"/>
-              <a:t>6/18/24</a:t>
+              <a:t>7/1/24</a:t>
             </a:fld>
             <a:endParaRPr lang="en-US"/>
           </a:p>
@@ -2355,7 +2355,7 @@
           <a:p>
             <a:fld id="{CFC60B5F-2253-DF41-8690-61B53F1555CE}" type="datetimeFigureOut">
               <a:rPr lang="en-US" smtClean="0"/>
-              <a:t>6/18/24</a:t>
+              <a:t>7/1/24</a:t>
             </a:fld>
             <a:endParaRPr lang="en-US"/>
           </a:p>
@@ -2568,7 +2568,7 @@
           <a:p>
             <a:fld id="{CFC60B5F-2253-DF41-8690-61B53F1555CE}" type="datetimeFigureOut">
               <a:rPr lang="en-US" smtClean="0"/>
-              <a:t>6/18/24</a:t>
+              <a:t>7/1/24</a:t>
             </a:fld>
             <a:endParaRPr lang="en-US"/>
           </a:p>
@@ -2973,136 +2973,12 @@
           <a:chExt cx="0" cy="0"/>
         </a:xfrm>
       </p:grpSpPr>
-      <p:sp>
-        <p:nvSpPr>
-          <p:cNvPr id="8" name="TextBox 7">
+      <p:pic>
+        <p:nvPicPr>
+          <p:cNvPr id="6" name="Picture 5">
             <a:extLst>
               <a:ext uri="{FF2B5EF4-FFF2-40B4-BE49-F238E27FC236}">
-                <a16:creationId xmlns:a16="http://schemas.microsoft.com/office/drawing/2014/main" id="{F29E1621-45F5-0E44-8AE7-A27A3F167BBB}"/>
-              </a:ext>
-            </a:extLst>
-          </p:cNvPr>
-          <p:cNvSpPr txBox="1"/>
-          <p:nvPr/>
-        </p:nvSpPr>
-        <p:spPr>
-          <a:xfrm rot="16200000">
-            <a:off x="-1826544" y="1826545"/>
-            <a:ext cx="4114756" cy="461665"/>
-          </a:xfrm>
-          <a:prstGeom prst="rect">
-            <a:avLst/>
-          </a:prstGeom>
-          <a:noFill/>
-        </p:spPr>
-        <p:txBody>
-          <a:bodyPr wrap="square" rtlCol="0">
-            <a:spAutoFit/>
-          </a:bodyPr>
-          <a:lstStyle/>
-          <a:p>
-            <a:pPr algn="ctr"/>
-            <a:r>
-              <a:rPr lang="en-US" sz="2400" b="1" u="sng" dirty="0"/>
-              <a:t>Exploratory</a:t>
-            </a:r>
-          </a:p>
-        </p:txBody>
-      </p:sp>
-      <p:sp>
-        <p:nvSpPr>
-          <p:cNvPr id="9" name="TextBox 8">
-            <a:extLst>
-              <a:ext uri="{FF2B5EF4-FFF2-40B4-BE49-F238E27FC236}">
-                <a16:creationId xmlns:a16="http://schemas.microsoft.com/office/drawing/2014/main" id="{AFFD002C-597E-27AE-5BF2-45F12AD9ABE3}"/>
-              </a:ext>
-            </a:extLst>
-          </p:cNvPr>
-          <p:cNvSpPr txBox="1"/>
-          <p:nvPr/>
-        </p:nvSpPr>
-        <p:spPr>
-          <a:xfrm rot="16200000">
-            <a:off x="-1826587" y="5941347"/>
-            <a:ext cx="4114845" cy="461665"/>
-          </a:xfrm>
-          <a:prstGeom prst="rect">
-            <a:avLst/>
-          </a:prstGeom>
-          <a:noFill/>
-        </p:spPr>
-        <p:txBody>
-          <a:bodyPr wrap="square" rtlCol="0">
-            <a:spAutoFit/>
-          </a:bodyPr>
-          <a:lstStyle/>
-          <a:p>
-            <a:pPr algn="ctr"/>
-            <a:r>
-              <a:rPr lang="en-US" sz="2400" b="1" u="sng" dirty="0"/>
-              <a:t>Confirmatory</a:t>
-            </a:r>
-          </a:p>
-        </p:txBody>
-      </p:sp>
-      <p:sp>
-        <p:nvSpPr>
-          <p:cNvPr id="2" name="Rectangle 1">
-            <a:extLst>
-              <a:ext uri="{FF2B5EF4-FFF2-40B4-BE49-F238E27FC236}">
-                <a16:creationId xmlns:a16="http://schemas.microsoft.com/office/drawing/2014/main" id="{351A6723-6A9F-7741-C396-05C2116A8F26}"/>
-              </a:ext>
-            </a:extLst>
-          </p:cNvPr>
-          <p:cNvSpPr/>
-          <p:nvPr/>
-        </p:nvSpPr>
-        <p:spPr>
-          <a:xfrm>
-            <a:off x="849594" y="4649056"/>
-            <a:ext cx="998806" cy="407963"/>
-          </a:xfrm>
-          <a:prstGeom prst="rect">
-            <a:avLst/>
-          </a:prstGeom>
-          <a:solidFill>
-            <a:schemeClr val="bg1"/>
-          </a:solidFill>
-          <a:ln>
-            <a:noFill/>
-          </a:ln>
-        </p:spPr>
-        <p:style>
-          <a:lnRef idx="2">
-            <a:schemeClr val="accent1">
-              <a:shade val="15000"/>
-            </a:schemeClr>
-          </a:lnRef>
-          <a:fillRef idx="1">
-            <a:schemeClr val="accent1"/>
-          </a:fillRef>
-          <a:effectRef idx="0">
-            <a:schemeClr val="accent1"/>
-          </a:effectRef>
-          <a:fontRef idx="minor">
-            <a:schemeClr val="lt1"/>
-          </a:fontRef>
-        </p:style>
-        <p:txBody>
-          <a:bodyPr rtlCol="0" anchor="ctr"/>
-          <a:lstStyle/>
-          <a:p>
-            <a:pPr algn="ctr"/>
-            <a:endParaRPr lang="en-US"/>
-          </a:p>
-        </p:txBody>
-      </p:sp>
-      <p:pic>
-        <p:nvPicPr>
-          <p:cNvPr id="11" name="Picture 10">
-            <a:extLst>
-              <a:ext uri="{FF2B5EF4-FFF2-40B4-BE49-F238E27FC236}">
-                <a16:creationId xmlns:a16="http://schemas.microsoft.com/office/drawing/2014/main" id="{82D89AF1-D030-61FF-E74C-2705467544D7}"/>
+                <a16:creationId xmlns:a16="http://schemas.microsoft.com/office/drawing/2014/main" id="{AE171E44-93E4-44F8-F53D-5E6BC1AC94A7}"/>
               </a:ext>
             </a:extLst>
           </p:cNvPr>
@@ -3119,7 +2995,7 @@
         </p:blipFill>
         <p:spPr>
           <a:xfrm>
-            <a:off x="457200" y="-43"/>
+            <a:off x="457200" y="4114800"/>
             <a:ext cx="12344400" cy="4114800"/>
           </a:xfrm>
           <a:prstGeom prst="rect">
@@ -3127,36 +3003,78 @@
           </a:prstGeom>
         </p:spPr>
       </p:pic>
-      <p:pic>
-        <p:nvPicPr>
-          <p:cNvPr id="14" name="Picture 13">
+      <p:sp>
+        <p:nvSpPr>
+          <p:cNvPr id="8" name="TextBox 7">
             <a:extLst>
               <a:ext uri="{FF2B5EF4-FFF2-40B4-BE49-F238E27FC236}">
-                <a16:creationId xmlns:a16="http://schemas.microsoft.com/office/drawing/2014/main" id="{385AE472-F67C-C40A-ABF5-3EEF820401A2}"/>
+                <a16:creationId xmlns:a16="http://schemas.microsoft.com/office/drawing/2014/main" id="{F29E1621-45F5-0E44-8AE7-A27A3F167BBB}"/>
               </a:ext>
             </a:extLst>
           </p:cNvPr>
-          <p:cNvPicPr>
-            <a:picLocks noChangeAspect="1"/>
-          </p:cNvPicPr>
+          <p:cNvSpPr txBox="1"/>
           <p:nvPr/>
-        </p:nvPicPr>
-        <p:blipFill>
-          <a:blip r:embed="rId3"/>
-          <a:stretch>
-            <a:fillRect/>
-          </a:stretch>
-        </p:blipFill>
+        </p:nvSpPr>
         <p:spPr>
-          <a:xfrm>
-            <a:off x="457200" y="4114757"/>
-            <a:ext cx="12344400" cy="4114800"/>
+          <a:xfrm rot="16200000">
+            <a:off x="-1826544" y="1826545"/>
+            <a:ext cx="4114756" cy="461665"/>
           </a:xfrm>
           <a:prstGeom prst="rect">
             <a:avLst/>
           </a:prstGeom>
+          <a:noFill/>
         </p:spPr>
-      </p:pic>
+        <p:txBody>
+          <a:bodyPr wrap="square" rtlCol="0">
+            <a:spAutoFit/>
+          </a:bodyPr>
+          <a:lstStyle/>
+          <a:p>
+            <a:pPr algn="ctr"/>
+            <a:r>
+              <a:rPr lang="en-US" sz="2400" b="1" u="sng" dirty="0"/>
+              <a:t>Exploratory</a:t>
+            </a:r>
+          </a:p>
+        </p:txBody>
+      </p:sp>
+      <p:sp>
+        <p:nvSpPr>
+          <p:cNvPr id="9" name="TextBox 8">
+            <a:extLst>
+              <a:ext uri="{FF2B5EF4-FFF2-40B4-BE49-F238E27FC236}">
+                <a16:creationId xmlns:a16="http://schemas.microsoft.com/office/drawing/2014/main" id="{AFFD002C-597E-27AE-5BF2-45F12AD9ABE3}"/>
+              </a:ext>
+            </a:extLst>
+          </p:cNvPr>
+          <p:cNvSpPr txBox="1"/>
+          <p:nvPr/>
+        </p:nvSpPr>
+        <p:spPr>
+          <a:xfrm rot="16200000">
+            <a:off x="-1826587" y="5941347"/>
+            <a:ext cx="4114845" cy="461665"/>
+          </a:xfrm>
+          <a:prstGeom prst="rect">
+            <a:avLst/>
+          </a:prstGeom>
+          <a:noFill/>
+        </p:spPr>
+        <p:txBody>
+          <a:bodyPr wrap="square" rtlCol="0">
+            <a:spAutoFit/>
+          </a:bodyPr>
+          <a:lstStyle/>
+          <a:p>
+            <a:pPr algn="ctr"/>
+            <a:r>
+              <a:rPr lang="en-US" sz="2400" b="1" u="sng" dirty="0"/>
+              <a:t>Confirmatory</a:t>
+            </a:r>
+          </a:p>
+        </p:txBody>
+      </p:sp>
       <p:sp>
         <p:nvSpPr>
           <p:cNvPr id="15" name="Rectangle 14">
@@ -3171,7 +3089,7 @@
         </p:nvSpPr>
         <p:spPr>
           <a:xfrm>
-            <a:off x="5075583" y="4649056"/>
+            <a:off x="6076122" y="4614550"/>
             <a:ext cx="649356" cy="559048"/>
           </a:xfrm>
           <a:prstGeom prst="rect">
@@ -3211,6 +3129,36 @@
           </a:p>
         </p:txBody>
       </p:sp>
+      <p:pic>
+        <p:nvPicPr>
+          <p:cNvPr id="4" name="Picture 3">
+            <a:extLst>
+              <a:ext uri="{FF2B5EF4-FFF2-40B4-BE49-F238E27FC236}">
+                <a16:creationId xmlns:a16="http://schemas.microsoft.com/office/drawing/2014/main" id="{01D37D09-12C8-B5AB-57E2-1AD5D57E7E3E}"/>
+              </a:ext>
+            </a:extLst>
+          </p:cNvPr>
+          <p:cNvPicPr>
+            <a:picLocks noChangeAspect="1"/>
+          </p:cNvPicPr>
+          <p:nvPr/>
+        </p:nvPicPr>
+        <p:blipFill>
+          <a:blip r:embed="rId3"/>
+          <a:stretch>
+            <a:fillRect/>
+          </a:stretch>
+        </p:blipFill>
+        <p:spPr>
+          <a:xfrm>
+            <a:off x="457200" y="-89"/>
+            <a:ext cx="12344400" cy="4114800"/>
+          </a:xfrm>
+          <a:prstGeom prst="rect">
+            <a:avLst/>
+          </a:prstGeom>
+        </p:spPr>
+      </p:pic>
     </p:spTree>
     <p:extLst>
       <p:ext uri="{BB962C8B-B14F-4D97-AF65-F5344CB8AC3E}">
